--- a/catalog/samples/true_waterfall.pptx
+++ b/catalog/samples/true_waterfall.pptx
@@ -1197,7 +1197,7 @@
           </a:p>
           <a:p>
             <a:r>
-              <a:t>  "template_sha256": "72d1032f882b192dbe28072632838d3af70643245a4613a3f847f70b7dce6ff3"</a:t>
+              <a:t>  "template_sha256": "a2085ed3fc7bba03afe7222e073a7cccc4774f26e1b1402788ad0d22ff05b08a"</a:t>
             </a:r>
           </a:p>
           <a:p>
@@ -4837,7 +4837,7 @@
                 <a:ea typeface="Yu Gothic" pitchFamily="34" charset="-122"/>
                 <a:cs typeface="Yu Gothic" pitchFamily="34" charset="-120"/>
               </a:rPr>
-              <a:t>4</a:t>
+              <a:t>+4</a:t>
             </a:r>
             <a:endParaRPr lang="en-US" sz="1100" dirty="0"/>
           </a:p>
@@ -4945,7 +4945,7 @@
                 <a:ea typeface="Yu Gothic" pitchFamily="34" charset="-122"/>
                 <a:cs typeface="Yu Gothic" pitchFamily="34" charset="-120"/>
               </a:rPr>
-              <a:t>3</a:t>
+              <a:t>+3</a:t>
             </a:r>
             <a:endParaRPr lang="en-US" sz="1100" dirty="0"/>
           </a:p>
